--- a/个人工作台-答辩PPT/个人工作台-答辩PPT.pptx
+++ b/个人工作台-答辩PPT/个人工作台-答辩PPT.pptx
@@ -14674,7 +14674,7 @@
   <p:cSld>
     <p:spTree>
       <p:nvGrpSpPr>
-        <p:cNvPr id="274" name="" descr="&lt;Slide style={{ background: '#0B1020', padding: 60 }}&gt;&#10;    &lt;Box style={{ flexDirection: 'row', justifyContent: 'space-between', alignItems: 'flex-end' }}&gt;&#10;        &lt;Text style={{ fontSize: 34, fontWeight: 'bold', color: '#FFFFFF' }}&gt;核心实现 · 系统架构&lt;/Text&gt;&#10;        &lt;Text style={{ fontSize: 14, color: '#64748B' }}&gt;05 / 为什么这么拆&lt;/Text&gt;&#10;    &lt;/Box&gt;&#10;    &lt;Box style={{ width: '100%', height: 1, background: 'rgba(34,211,238,0.4)', marginTop: 14 }} /&gt;&#10;&#10;    &lt;Box style={{ marginTop: 16 }}&gt;&#10;        &lt;svg width={1160} height={400} viewBox='0 0 1160 400' fontFamily='Microsoft YaHei'&gt;&#10;            &lt;rect x='0' y='8' width='360' height='132' rx='10' fill='#151B33' stroke='#334155' /&gt;&#10;            &lt;text x='20' y='38' fill='#22D3EE' fontSize='18' fontWeight='bold'&gt;界面层 · React 18&lt;/text&gt;&#10;            &lt;text x='20' y='64' fill='#E2E8F0' fontSize='15'&gt;今日 / 收集箱 / 草稿箱 / 日历 / 知识库&lt;/text&gt;&#10;            &lt;text x='20' y='88' fill='#E2E8F0' fontSize='15'&gt;搜索（三模式）/ 信息流 / 图谱 / 设置&lt;/text&gt;&#10;            &lt;text x='20' y='112' fill='#94A3B8' fontSize='14'&gt;79 个源文件 · 15,173 行 TS/TSX&lt;/text&gt;&#10;&#10;            &lt;rect x='400' y='8' width='360' height='132' rx='10' fill='#151B33' stroke='#4F46E5' /&gt;&#10;            &lt;text x='420' y='38' fill='#4F46E5' fontSize='18' fontWeight='bold'&gt;应用层 · src/core（与界面解耦）&lt;/text&gt;&#10;            &lt;text x='420' y='64' fill='#E2E8F0' fontSize='15'&gt;ai/ 编排 · search/ 检索 · repo/ 存储&lt;/text&gt;&#10;            &lt;text x='420' y='88' fill='#E2E8F0' fontSize='15'&gt;sync/ 同步 · aggregator/ 镜像 · domain/ 纯函数&lt;/text&gt;&#10;            &lt;text x='420' y='112' fill='#94A3B8' fontSize='14'&gt;capabilities.ts：每项能力带原因与修复入口&lt;/text&gt;&#10;&#10;            &lt;rect x='800' y='8' width='180' height='132' rx='10' fill='#151B33' stroke='#334155' /&gt;&#10;            &lt;text x='820' y='38' fill='#22D3EE' fontSize='18' fontWeight='bold'&gt;桌面壳 · Rust&lt;/text&gt;&#10;            &lt;text x='820' y='64' fill='#E2E8F0' fontSize='15'&gt;通知 / 文件对话框&lt;/text&gt;&#10;            &lt;text x='820' y='88' fill='#E2E8F0' fontSize='15'&gt;托盘 / 悬浮窗 / 快捷键&lt;/text&gt;&#10;            &lt;text x='820' y='112' fill='#94A3B8' fontSize='14'&gt;484 行，只做 Web 做不到的&lt;/text&gt;&#10;&#10;            &lt;rect x='1000' y='8' width='160' height='132' rx='10' fill='#151B33' stroke='#F0ABFC' strokeDasharray='5 4' /&gt;&#10;            &lt;text x='1020' y='38' fill='#F0ABFC' fontSize='18' fontWeight='bold'&gt;云端 AI（可选）&lt;/text&gt;&#10;            &lt;text x='1020' y='64' fill='#E2E8F0' fontSize='15'&gt;DeepSeek&lt;/text&gt;&#10;            &lt;text x='1020' y='88' fill='#E2E8F0' fontSize='15'&gt;Ollama · 自定义&lt;/text&gt;&#10;            &lt;text x='1020' y='112' fill='#94A3B8' fontSize='14'&gt;OpenAI 兼容协议&lt;/text&gt;&#10;&#10;            &lt;path d='M360 74 L394 74' stroke='#475569' strokeWidth='2' /&gt;&#10;            &lt;path d='M388 68 L394 74 L388 80' fill='none' stroke='#475569' strokeWidth='2' /&gt;&#10;            &lt;path d='M760 74 L794 74' stroke='#475569' strokeWidth='2' /&gt;&#10;            &lt;path d='M788 68 L794 74 L788 80' fill='none' stroke='#475569' strokeWidth='2' /&gt;&#10;            &lt;path d='M760 60 L1000 60' stroke='#F0ABFC' strokeWidth='2' strokeDasharray='5 4' /&gt;&#10;            &lt;text x='800' y='52' fill='#94A3B8' fontSize='13'&gt;可断开&lt;/text&gt;&#10;&#10;            &lt;rect x='0' y='190' width='270' height='120' rx='10' fill='#151B33' stroke='#334155' /&gt;&#10;            &lt;text x='20' y='220' fill='#22D3EE' fontSize='18' fontWeight='bold'&gt;本地 AI（离线）&lt;/text&gt;&#10;            &lt;text x='20' y='246' fill='#E2E8F0' fontSize='15'&gt;transformers.js + bge-small-zh&lt;/text&gt;&#10;            &lt;text x='20' y='270' fill='#E2E8F0' fontSize='15'&gt;tesseract.js OCR · 本地规则兜底&lt;/text&gt;&#10;            &lt;text x='20' y='294' fill='#94A3B8' fontSize='14'&gt;25MB 模型，数据不出进程&lt;/text&gt;&#10;&#10;            &lt;rect x='310' y='190' width='250' height='120' rx='10' fill='#151B33' stroke='#334155' /&gt;&#10;            &lt;text x='330' y='220' fill='#22D3EE' fontSize='18' fontWeight='bold'&gt;本地存储&lt;/text&gt;&#10;            &lt;text x='330' y='246' fill='#E2E8F0' fontSize='15'&gt;IndexedDB（Dexie v1→v4）&lt;/text&gt;&#10;            &lt;text x='330' y='270' fill='#E2E8F0' fontSize='15'&gt;OPFS 附件 · 向量索引 512 维&lt;/text&gt;&#10;            &lt;text x='330' y='294' fill='#94A3B8' fontSize='14'&gt;快照镜像：feedItems&lt;/text&gt;&#10;&#10;            &lt;rect x='600' y='190' width='300' height='120' rx='10' fill='#151B33' stroke='#4F46E5' /&gt;&#10;            &lt;text x='620' y='220' fill='#4F46E5' fontSize='18' fontWeight='bold'&gt;聚合服务 · Python 常驻&lt;/text&gt;&#10;            &lt;text x='620' y='246' fill='#E2E8F0' fontSize='15'&gt;调度器 → 抓取 → 解析 → 去重 → 存&lt;/text&gt;&#10;            &lt;text x='620' y='270' fill='#E2E8F0' fontSize='15'&gt;正文抓取（按域名限速）→ SQLite&lt;/text&gt;&#10;            &lt;text x='620' y='294' fill='#94A3B8' fontSize='14'&gt;仅监听 127.0.0.1:8787&lt;/text&gt;&#10;&#10;            &lt;rect x='940' y='190' width='220' height='120' rx='10' fill='#151B33' stroke='#334155' /&gt;&#10;            &lt;text x='960' y='220' fill='#22D3EE' fontSize='18' fontWeight='bold'&gt;同步（可选）&lt;/text&gt;&#10;            &lt;text x='960' y='246' fill='#E2E8F0' fontSize='15'&gt;GitHub 私有仓库&lt;/text&gt;&#10;            &lt;text x='960' y='270' fill='#E2E8F0' fontSize='15'&gt;本地文件夹 · WebDAV&lt;/text&gt;&#10;            &lt;text x='960' y='294' fill='#94A3B8' fontSize='14'&gt;三路合并，冲突不自动覆盖&lt;/text&gt;&#10;&#10;            &lt;path d='M580 74 L580 190' stroke='#475569' strokeWidth='2' /&gt;&#10;            &lt;path d='M135 140 L135 186' stroke='#475569' strokeWidth='2' /&gt;&#10;            &lt;path d='M435 140 L435 186' stroke='#475569' strokeWidth='2' /&gt;&#10;            &lt;path d='M580 250 L750 250' stroke='#4F46E5' strokeWidth='2' /&gt;&#10;            &lt;path d='M744 244 L750 250 L744 256' fill='none' stroke='#4F46E5' strokeWidth='2' /&gt;&#10;            &lt;text x='620' y='240' fill='#94A3B8' fontSize='13'&gt;本机 HTTP&lt;/text&gt;&#10;            &lt;path d='M890 74 L1050 186' stroke='#475569' strokeWidth='2' strokeDasharray='5 4' /&gt;&#10;&#10;            &lt;text x='0' y='352' fill='#94A3B8' fontSize='15'&gt;实线 = 默认路径　虚线 = 可选（断开后核心功能仍完整）　紫框 = 可独立部署的进程&lt;/text&gt;&#10;            &lt;text x='0' y='378' fill='#94A3B8' fontSize='15'&gt;聚合服务独立成进程的原因：浏览器关了也要继续抓；且多数站点不提供 CORS 头，前端直连必然失败&lt;/text&gt;&#10;        &lt;/svg&gt;&#10;    &lt;/Box&gt;&#10;&#10;    &lt;Text style={{ fontSize: 14, color: '#64748B', position: 'absolute', left: 60, top: 670 }}&gt;个人工作台 · v0.2.0&lt;/Text&gt;&#10;&lt;/Slide&gt;&#10;"/>
+        <p:cNvPr id="274" name="" descr="&lt;Slide style={{ background: '#0B1020', padding: 60 }}&gt;&#10;    &lt;Box style={{ flexDirection: 'row', justifyContent: 'space-between', alignItems: 'flex-end' }}&gt;&#10;        &lt;Text style={{ fontSize: 34, fontWeight: 'bold', color: '#FFFFFF' }}&gt;核心实现 · 系统架构&lt;/Text&gt;&#10;        &lt;Text style={{ fontSize: 14, color: '#64748B' }}&gt;05 / 为什么这么拆&lt;/Text&gt;&#10;    &lt;/Box&gt;&#10;    &lt;Box style={{ width: '100%', height: 1, background: 'rgba(34,211,238,0.4)', marginTop: 14 }} /&gt;&#10;&#10;    &lt;Box style={{ flexDirection: 'row', gap: 24, marginTop: 16 }}&gt;&#10;        &lt;Box style={{ width: 700 }}&gt;&#10;            &lt;svg width={700} height={430} viewBox='0 0 700 430' fontFamily='Microsoft YaHei'&gt;&#10;                &lt;rect x='0' y='0' width='700' height='68' rx='8' fill='#151B33' stroke='#334155' /&gt;&#10;                &lt;text x='18' y='28' fill='#22D3EE' fontSize='17' fontWeight='bold'&gt;界面层 · React 18&lt;/text&gt;&#10;                &lt;text x='18' y='52' fill='#94A3B8' fontSize='14'&gt;今日 / 收集箱 / 草稿箱 / 日历 / 知识库 / 搜索 / 信息流 / 图谱&lt;/text&gt;&#10;&#10;                &lt;path d='M350 68 L350 84' stroke='#475569' strokeWidth='2' /&gt;&#10;&#10;                &lt;rect x='0' y='86' width='700' height='78' rx='8' fill='#151B33' stroke='#4F46E5' /&gt;&#10;                &lt;text x='18' y='114' fill='#4F46E5' fontSize='17' fontWeight='bold'&gt;应用层 · src/core（与界面解耦）&lt;/text&gt;&#10;                &lt;text x='18' y='138' fill='#E2E8F0' fontSize='14'&gt;ai/ 编排　search/ 检索　repo/ 存储　sync/ 同步　aggregator/ 镜像&lt;/text&gt;&#10;                &lt;text x='18' y='156' fill='#94A3B8' fontSize='13'&gt;capabilities.ts：每项能力带原因与修复入口&lt;/text&gt;&#10;&#10;                &lt;path d='M175 164 L175 182' stroke='#475569' strokeWidth='2' /&gt;&#10;                &lt;path d='M525 164 L525 182' stroke='#475569' strokeWidth='2' /&gt;&#10;                &lt;path d='M175 172 L525 172' stroke='#475569' strokeWidth='2' /&gt;&#10;&#10;                &lt;rect x='0' y='184' width='340' height='60' rx='8' fill='#151B33' stroke='#334155' /&gt;&#10;                &lt;text x='18' y='210' fill='#22D3EE' fontSize='16' fontWeight='bold'&gt;桌面壳 · Rust（484 行）&lt;/text&gt;&#10;                &lt;text x='18' y='232' fill='#94A3B8' fontSize='13'&gt;通知 / 文件对话框 / 托盘 / 悬浮窗 / 快捷键&lt;/text&gt;&#10;&#10;                &lt;rect x='360' y='184' width='340' height='60' rx='8' fill='#151B33' stroke='#F0ABFC' strokeDasharray='5 4' /&gt;&#10;                &lt;text x='378' y='210' fill='#F0ABFC' fontSize='16' fontWeight='bold'&gt;云端 AI（可选 · 可断开）&lt;/text&gt;&#10;                &lt;text x='378' y='232' fill='#94A3B8' fontSize='13'&gt;DeepSeek / Ollama / 自定义 · OpenAI 兼容&lt;/text&gt;&#10;&#10;                &lt;path d='M170 244 L170 262' stroke='#475569' strokeWidth='2' /&gt;&#10;                &lt;path d='M530 244 L530 262' stroke='#475569' strokeWidth='2' /&gt;&#10;&#10;                &lt;rect x='0' y='264' width='340' height='58' rx='8' fill='#151B33' stroke='#334155' /&gt;&#10;                &lt;text x='18' y='288' fill='#22D3EE' fontSize='16' fontWeight='bold'&gt;本地 AI（离线）&lt;/text&gt;&#10;                &lt;text x='18' y='309' fill='#94A3B8' fontSize='13'&gt;transformers.js + bge-small-zh · tesseract · 规则兜底&lt;/text&gt;&#10;&#10;                &lt;rect x='360' y='264' width='340' height='58' rx='8' fill='#151B33' stroke='#334155' /&gt;&#10;                &lt;text x='378' y='288' fill='#22D3EE' fontSize='16' fontWeight='bold'&gt;本地存储&lt;/text&gt;&#10;                &lt;text x='378' y='309' fill='#94A3B8' fontSize='13'&gt;IndexedDB（Dexie v1→v4）· OPFS · 向量 512 维&lt;/text&gt;&#10;&#10;                &lt;path d='M170 322 L170 340' stroke='#475569' strokeWidth='2' /&gt;&#10;                &lt;path d='M530 322 L530 340' stroke='#475569' strokeWidth='2' /&gt;&#10;&#10;                &lt;rect x='0' y='342' width='340' height='62' rx='8' fill='#151B33' stroke='#4F46E5' /&gt;&#10;                &lt;text x='18' y='366' fill='#4F46E5' fontSize='16' fontWeight='bold'&gt;聚合服务 · Python 常驻&lt;/text&gt;&#10;                &lt;text x='18' y='388' fill='#94A3B8' fontSize='13'&gt;调度 → 抓取 → 解析 → 去重 → 存 → 补正文&lt;/text&gt;&#10;                &lt;text x='18' y='402' fill='#64748B' fontSize='12'&gt;SQLite · 仅监听 127.0.0.1:8787&lt;/text&gt;&#10;&#10;                &lt;rect x='360' y='342' width='340' height='62' rx='8' fill='#151B33' stroke='#334155' /&gt;&#10;                &lt;text x='378' y='366' fill='#22D3EE' fontSize='16' fontWeight='bold'&gt;同步（可选）&lt;/text&gt;&#10;                &lt;text x='378' y='388' fill='#94A3B8' fontSize='13'&gt;GitHub 私有仓库 / 本地文件夹 · 三路合并&lt;/text&gt;&#10;                &lt;text x='378' y='402' fill='#64748B' fontSize='12'&gt;冲突绝不自动覆盖&lt;/text&gt;&#10;&#10;                &lt;path d='M170 403 L170 412 L360 412' stroke='#475569' strokeWidth='2' fill='none' /&gt;&#10;                &lt;text x='180' y='424' fill='#94A3B8' fontSize='12'&gt;实线=默认路径　虚线=可选　紫框=独立进程&lt;/text&gt;&#10;            &lt;/svg&gt;&#10;        &lt;/Box&gt;&#10;&#10;        &lt;Box style={{ width: 416 }}&gt;&#10;            &lt;Text style={{ fontSize: 20, fontWeight: 'bold', color: '#22D3EE' }}&gt;它跑起来是这样&lt;/Text&gt;&#10;            &lt;Image src=&quot;assets/feed-list.png&quot; style={{ width: 416, height: 190, objectFit: 'cover', borderRadius: 8, border: '1px solid #334155', marginTop: 10 }} /&gt;&#10;            &lt;Text style={{ fontSize: 15, color: '#94A3B8', marginTop: 6, lineHeight: 1.4 }}&gt;&#10;                信息流：左侧 5 个来源，右侧条目列表 —— 前端 ↔ 聚合服务的真实协作&#10;            &lt;/Text&gt;&#10;            &lt;Image src=&quot;assets/settings-checkup.png&quot; style={{ width: 416, height: 190, objectFit: 'cover', borderRadius: 8, border: '1px solid #334155', marginTop: 12 }} /&gt;&#10;            &lt;Text style={{ fontSize: 15, color: '#94A3B8', marginTop: 6, lineHeight: 1.4 }}&gt;&#10;                一键体检：每一项能力能不能用、为什么、去哪修&#10;            &lt;/Text&gt;&#10;        &lt;/Box&gt;&#10;    &lt;/Box&gt;&#10;&#10;    &lt;Text style={{ fontSize: 14, color: '#64748B', position: 'absolute', left: 60, top: 670 }}&gt;个人工作台 · v0.2.0&lt;/Text&gt;&#10;&lt;/Slide&gt;&#10;"/>
         <p:cNvGrpSpPr/>
         <p:nvPr/>
       </p:nvGrpSpPr>
@@ -14859,7 +14859,7 @@
         <p:spPr>
           <a:xfrm rot="0" flipH="0" flipV="0">
             <a:off x="571500" y="1257300"/>
-            <a:ext cx="11049000" cy="3810000"/>
+            <a:ext cx="6667500" cy="4095750"/>
           </a:xfrm>
           <a:prstGeom prst="rect">
             <a:avLst/>
@@ -14870,6 +14870,281 @@
       <p:sp>
         <p:nvSpPr>
           <p:cNvPr id="280" name="" descr="{&quot;isTemplate&quot;:true,&quot;type&quot;:&quot;text&quot;}"/>
+          <p:cNvSpPr txBox="1"/>
+          <p:nvPr/>
+        </p:nvSpPr>
+        <p:spPr>
+          <a:xfrm rot="0" flipH="0" flipV="0">
+            <a:off x="7467600" y="1257300"/>
+            <a:ext cx="3962400" cy="228600"/>
+          </a:xfrm>
+          <a:prstGeom prst="rect"/>
+        </p:spPr>
+        <p:txBody>
+          <a:bodyPr wrap="none" lIns="0" tIns="0" rIns="0" bIns="0"/>
+          <a:p>
+            <a:pPr>
+              <a:lnSpc>
+                <a:spcPct val="100000"/>
+              </a:lnSpc>
+            </a:pPr>
+            <a:r>
+              <a:rPr lang="zh-CN" sz="1500" b="1">
+                <a:solidFill>
+                  <a:srgbClr val="22D3EE"/>
+                </a:solidFill>
+                <a:latin typeface="Microsoft YaHei"/>
+                <a:ea typeface="Microsoft YaHei"/>
+              </a:rPr>
+              <a:t>它跑起来是这样</a:t>
+            </a:r>
+            <a:endParaRPr/>
+          </a:p>
+        </p:txBody>
+      </p:sp>
+      <p:sp>
+        <p:nvSpPr>
+          <p:cNvPr id="281" name=""/>
+          <p:cNvSpPr/>
+          <p:nvPr/>
+        </p:nvSpPr>
+        <p:spPr>
+          <a:xfrm rot="0" flipH="0" flipV="0">
+            <a:off x="7467600" y="1581150"/>
+            <a:ext cx="3962400" cy="1809750"/>
+          </a:xfrm>
+          <a:prstGeom prst="rect">
+            <a:avLst/>
+          </a:prstGeom>
+          <a:ln w="12700">
+            <a:solidFill>
+              <a:srgbClr val="334155"/>
+            </a:solidFill>
+            <a:prstDash val="solid"/>
+          </a:ln>
+        </p:spPr>
+        <p:txBody>
+          <a:bodyPr/>
+          <a:p/>
+        </p:txBody>
+      </p:sp>
+      <p:pic>
+        <p:nvPicPr>
+          <p:cNvPr id="282" name=""/>
+          <p:cNvPicPr>
+            <a:picLocks noChangeAspect="1"/>
+          </p:cNvPicPr>
+          <p:nvPr/>
+        </p:nvPicPr>
+        <p:blipFill>
+          <a:blip r:embed="rId2"/>
+          <a:srcRect l="0" t="11390" r="0" b="11390"/>
+          <a:stretch>
+            <a:fillRect/>
+          </a:stretch>
+        </p:blipFill>
+        <p:spPr>
+          <a:xfrm rot="0" flipH="0" flipV="0">
+            <a:off x="7467600" y="1581150"/>
+            <a:ext cx="3962400" cy="1809750"/>
+          </a:xfrm>
+          <a:prstGeom prst="roundRect">
+            <a:avLst>
+              <a:gd name="adj" fmla="val 4211"/>
+            </a:avLst>
+          </a:prstGeom>
+          <a:ln/>
+        </p:spPr>
+      </p:pic>
+      <p:sp>
+        <p:nvSpPr>
+          <p:cNvPr id="283" name="" descr="{&quot;isTemplate&quot;:true,&quot;type&quot;:&quot;text&quot;}"/>
+          <p:cNvSpPr txBox="1"/>
+          <p:nvPr/>
+        </p:nvSpPr>
+        <p:spPr>
+          <a:xfrm rot="0" flipH="0" flipV="0">
+            <a:off x="7467600" y="3448050"/>
+            <a:ext cx="3962400" cy="485775"/>
+          </a:xfrm>
+          <a:prstGeom prst="rect"/>
+        </p:spPr>
+        <p:txBody>
+          <a:bodyPr wrap="square" lIns="0" tIns="0" rIns="0" bIns="0">
+            <a:normAutofit/>
+          </a:bodyPr>
+          <a:p>
+            <a:pPr>
+              <a:lnSpc>
+                <a:spcPct val="140000"/>
+              </a:lnSpc>
+            </a:pPr>
+            <a:r>
+              <a:rPr lang="zh-CN" sz="1125">
+                <a:solidFill>
+                  <a:srgbClr val="94A3B8"/>
+                </a:solidFill>
+                <a:latin typeface="Microsoft YaHei"/>
+                <a:ea typeface="Microsoft YaHei"/>
+              </a:rPr>
+              <a:t>信息流：左侧</a:t>
+            </a:r>
+            <a:r>
+              <a:rPr lang="en-US" sz="1125">
+                <a:solidFill>
+                  <a:srgbClr val="94A3B8"/>
+                </a:solidFill>
+                <a:latin typeface="Microsoft YaHei"/>
+                <a:ea typeface="Microsoft YaHei"/>
+              </a:rPr>
+              <a:t xml:space="preserve"> 5 </a:t>
+            </a:r>
+            <a:r>
+              <a:rPr lang="zh-CN" sz="1125">
+                <a:solidFill>
+                  <a:srgbClr val="94A3B8"/>
+                </a:solidFill>
+                <a:latin typeface="Microsoft YaHei"/>
+                <a:ea typeface="Microsoft YaHei"/>
+              </a:rPr>
+              <a:t>个来源，右侧条目列表</a:t>
+            </a:r>
+            <a:r>
+              <a:rPr lang="en-US" sz="1125">
+                <a:solidFill>
+                  <a:srgbClr val="94A3B8"/>
+                </a:solidFill>
+                <a:latin typeface="Microsoft YaHei"/>
+                <a:ea typeface="Microsoft YaHei"/>
+              </a:rPr>
+              <a:t xml:space="preserve"> —— </a:t>
+            </a:r>
+            <a:r>
+              <a:rPr lang="zh-CN" sz="1125">
+                <a:solidFill>
+                  <a:srgbClr val="94A3B8"/>
+                </a:solidFill>
+                <a:latin typeface="Microsoft YaHei"/>
+                <a:ea typeface="Microsoft YaHei"/>
+              </a:rPr>
+              <a:t>前端</a:t>
+            </a:r>
+            <a:r>
+              <a:rPr lang="en-US" sz="1125">
+                <a:solidFill>
+                  <a:srgbClr val="94A3B8"/>
+                </a:solidFill>
+                <a:latin typeface="Microsoft YaHei"/>
+                <a:ea typeface="Microsoft YaHei"/>
+              </a:rPr>
+              <a:t xml:space="preserve"> ↔ </a:t>
+            </a:r>
+            <a:r>
+              <a:rPr lang="zh-CN" sz="1125">
+                <a:solidFill>
+                  <a:srgbClr val="94A3B8"/>
+                </a:solidFill>
+                <a:latin typeface="Microsoft YaHei"/>
+                <a:ea typeface="Microsoft YaHei"/>
+              </a:rPr>
+              <a:t>聚合服务的真实协作</a:t>
+            </a:r>
+            <a:endParaRPr/>
+          </a:p>
+        </p:txBody>
+      </p:sp>
+      <p:sp>
+        <p:nvSpPr>
+          <p:cNvPr id="284" name=""/>
+          <p:cNvSpPr/>
+          <p:nvPr/>
+        </p:nvSpPr>
+        <p:spPr>
+          <a:xfrm rot="0" flipH="0" flipV="0">
+            <a:off x="7467600" y="4048125"/>
+            <a:ext cx="3962400" cy="1809750"/>
+          </a:xfrm>
+          <a:prstGeom prst="rect">
+            <a:avLst/>
+          </a:prstGeom>
+          <a:ln w="12700">
+            <a:solidFill>
+              <a:srgbClr val="334155"/>
+            </a:solidFill>
+            <a:prstDash val="solid"/>
+          </a:ln>
+        </p:spPr>
+        <p:txBody>
+          <a:bodyPr/>
+          <a:p/>
+        </p:txBody>
+      </p:sp>
+      <p:pic>
+        <p:nvPicPr>
+          <p:cNvPr id="285" name=""/>
+          <p:cNvPicPr>
+            <a:picLocks noChangeAspect="1"/>
+          </p:cNvPicPr>
+          <p:nvPr/>
+        </p:nvPicPr>
+        <p:blipFill>
+          <a:blip r:embed="rId3"/>
+          <a:srcRect l="0" t="10396" r="0" b="10396"/>
+          <a:stretch>
+            <a:fillRect/>
+          </a:stretch>
+        </p:blipFill>
+        <p:spPr>
+          <a:xfrm rot="0" flipH="0" flipV="0">
+            <a:off x="7467600" y="4048125"/>
+            <a:ext cx="3962400" cy="1809750"/>
+          </a:xfrm>
+          <a:prstGeom prst="roundRect">
+            <a:avLst>
+              <a:gd name="adj" fmla="val 4211"/>
+            </a:avLst>
+          </a:prstGeom>
+          <a:ln/>
+        </p:spPr>
+      </p:pic>
+      <p:sp>
+        <p:nvSpPr>
+          <p:cNvPr id="286" name="" descr="{&quot;isTemplate&quot;:true,&quot;type&quot;:&quot;text&quot;}"/>
+          <p:cNvSpPr txBox="1"/>
+          <p:nvPr/>
+        </p:nvSpPr>
+        <p:spPr>
+          <a:xfrm rot="0" flipH="0" flipV="0">
+            <a:off x="7467600" y="5915025"/>
+            <a:ext cx="3962400" cy="247650"/>
+          </a:xfrm>
+          <a:prstGeom prst="rect"/>
+        </p:spPr>
+        <p:txBody>
+          <a:bodyPr wrap="none" lIns="0" tIns="0" rIns="0" bIns="0"/>
+          <a:p>
+            <a:pPr>
+              <a:lnSpc>
+                <a:spcPct val="140000"/>
+              </a:lnSpc>
+            </a:pPr>
+            <a:r>
+              <a:rPr lang="zh-CN" sz="1125">
+                <a:solidFill>
+                  <a:srgbClr val="94A3B8"/>
+                </a:solidFill>
+                <a:latin typeface="Microsoft YaHei"/>
+                <a:ea typeface="Microsoft YaHei"/>
+              </a:rPr>
+              <a:t>一键体检：每一项能力能不能用、为什么、去哪修</a:t>
+            </a:r>
+            <a:endParaRPr/>
+          </a:p>
+        </p:txBody>
+      </p:sp>
+      <p:sp>
+        <p:nvSpPr>
+          <p:cNvPr id="287" name="" descr="{&quot;isTemplate&quot;:true,&quot;type&quot;:&quot;text&quot;}"/>
           <p:cNvSpPr txBox="1"/>
           <p:nvPr/>
         </p:nvSpPr>
@@ -14922,7 +15197,7 @@
   <p:cSld>
     <p:spTree>
       <p:nvGrpSpPr>
-        <p:cNvPr id="281" name="" descr="&lt;Slide style={{ background: '#0B1020', padding: 60 }}&gt;&#13;&#10;    &lt;Box style={{ flexDirection: 'row', justifyContent: 'space-between', alignItems: 'flex-end' }}&gt;&#13;&#10;        &lt;Text style={{ fontSize: 34, fontWeight: 'bold', color: '#FFFFFF' }}&gt;结果与证据 · 一条通知走完全程&lt;/Text&gt;&#13;&#10;        &lt;Text style={{ fontSize: 14, color: '#64748B' }}&gt;06 / 端到端效果&lt;/Text&gt;&#13;&#10;    &lt;/Box&gt;&#13;&#10;    &lt;Box style={{ width: '100%', height: 1, background: 'rgba(34,211,238,0.4)', marginTop: 14 }} /&gt;&#13;&#10;&#13;&#10;    &lt;Box style={{ flexDirection: 'row', gap: 32, marginTop: 22 }}&gt;&#13;&#10;        &lt;Box style={{ width: 400 }}&gt;&#13;&#10;            &lt;Box style={{ flexDirection: 'row', alignItems: 'flex-end', gap: 12 }}&gt;&#13;&#10;                &lt;Text style={{ fontSize: 96, fontWeight: 'bold', color: '#F0ABFC', lineHeight: 1 }}&gt;9&lt;/Text&gt;&#13;&#10;                &lt;Text style={{ fontSize: 18, color: '#94A3B8', marginBottom: 14 }}&gt;条结构化草稿&lt;/Text&gt;&#13;&#10;            &lt;/Box&gt;&#13;&#10;            &lt;Text style={{ fontSize: 18, color: '#E2E8F0', lineHeight: 1.6, marginTop: 8 }}&gt;&#13;&#10;                从一段 &lt;span style={{ color: '#22D3EE', fontWeight: 'bold' }}&gt;472 字&lt;/span&gt;的班级群消息里解析出来，&#13;&#10;                每条都带类型、优先级、开始/截止、地点、标签。&#13;&#10;            &lt;/Text&gt;&#13;&#10;&#13;&#10;            &lt;Box style={{ gap: 14, marginTop: 22 }}&gt;&#13;&#10;                &lt;Box style={{ flexDirection: 'row', gap: 12 }}&gt;&#13;&#10;                    &lt;Box style={{ width: 28, height: 28, borderRadius: 14, background: '#4F46E5' }} /&gt;&#13;&#10;                    &lt;Text style={{ fontSize: 18, color: '#E2E8F0', lineHeight: 1.5, flex: 1 }}&gt;&#13;&#10;                        模型没把握的字段&lt;span style={{ color: '#F0ABFC' }}&gt;标黄&lt;/span&gt;，提醒你重点看这几处&#13;&#10;                    &lt;/Text&gt;&#13;&#10;                &lt;/Box&gt;&#13;&#10;                &lt;Box style={{ flexDirection: 'row', gap: 12 }}&gt;&#13;&#10;                    &lt;Box style={{ width: 28, height: 28, borderRadius: 14, background: '#22D3EE' }} /&gt;&#13;&#10;                    &lt;Text style={{ fontSize: 18, color: '#E2E8F0', lineHeight: 1.5, flex: 1 }}&gt;&#13;&#10;                        左原文右字段对照改，可&quot;丢弃 / 保存修改 / 确认并加入&quot;&#13;&#10;                    &lt;/Text&gt;&#13;&#10;                &lt;/Box&gt;&#13;&#10;                &lt;Box style={{ flexDirection: 'row', gap: 12 }}&gt;&#13;&#10;                    &lt;Box style={{ width: 28, height: 28, borderRadius: 14, background: '#F0ABFC' }} /&gt;&#13;&#10;                    &lt;Text style={{ fontSize: 18, color: '#E2E8F0', lineHeight: 1.5, flex: 1 }}&gt;&#13;&#10;                        不确认就不入库 —— AI 全程只写草稿箱&#13;&#10;                    &lt;/Text&gt;&#13;&#10;                &lt;/Box&gt;&#13;&#10;            &lt;/Box&gt;&#13;&#10;        &lt;/Box&gt;&#13;&#10;&#13;&#10;        &lt;Box style={{ width: 700 }}&gt;&#13;&#10;            &lt;Image src=&quot;assets/drafts.png&quot; style={{ width: 700, height: 300, objectFit: 'cover', borderRadius: 8, border: '1px solid #334155' }} /&gt;&#13;&#10;            &lt;Box style={{ flexDirection: 'row', gap: 16, marginTop: 12 }}&gt;&#13;&#10;                &lt;Image src=&quot;assets/inbox-input.png&quot; style={{ width: 340, height: 140, objectFit: 'cover', borderRadius: 8, border: '1px solid #334155' }} /&gt;&#13;&#10;                &lt;Image src=&quot;assets/inbox-item.png&quot; style={{ width: 340, height: 140, objectFit: 'cover', borderRadius: 8, border: '1px solid #334155' }} /&gt;&#13;&#10;            &lt;/Box&gt;&#13;&#10;        &lt;/Box&gt;&#13;&#10;    &lt;/Box&gt;&#13;&#10;&#13;&#10;    &lt;Box style={{ marginTop: 16, padding: 16, background: '#151B33', borderRadius: 8, borderLeft: '3px solid #22D3EE' }}&gt;&#13;&#10;        &lt;Text style={{ fontSize: 18, color: '#E2E8F0', lineHeight: 1.5 }}&gt;&#13;&#10;            &lt;span style={{ fontWeight: 'bold', color: '#22D3EE' }}&gt;价值&lt;/span&gt;&#13;&#10;            ：原本要手打 9 条日程、逐条填时间和地点，现在只需要粘贴 + 点确认 —— 而且不会漏掉&quot;面试要带简历&quot;这种藏在段落中间的截止点。&#13;&#10;        &lt;/Text&gt;&#13;&#10;    &lt;/Box&gt;&#13;&#10;&#13;&#10;    &lt;Text style={{ fontSize: 14, color: '#64748B', position: 'absolute', left: 60, top: 670 }}&gt;个人工作台 · v0.2.0&lt;/Text&gt;&#13;&#10;&lt;/Slide&gt;&#13;&#10;"/>
+        <p:cNvPr id="288" name="" descr="&lt;Slide style={{ background: '#0B1020', padding: 60 }}&gt;&#13;&#10;    &lt;Box style={{ flexDirection: 'row', justifyContent: 'space-between', alignItems: 'flex-end' }}&gt;&#13;&#10;        &lt;Text style={{ fontSize: 34, fontWeight: 'bold', color: '#FFFFFF' }}&gt;结果与证据 · 一条通知走完全程&lt;/Text&gt;&#13;&#10;        &lt;Text style={{ fontSize: 14, color: '#64748B' }}&gt;06 / 端到端效果&lt;/Text&gt;&#13;&#10;    &lt;/Box&gt;&#13;&#10;    &lt;Box style={{ width: '100%', height: 1, background: 'rgba(34,211,238,0.4)', marginTop: 14 }} /&gt;&#13;&#10;&#13;&#10;    &lt;Box style={{ flexDirection: 'row', gap: 32, marginTop: 22 }}&gt;&#13;&#10;        &lt;Box style={{ width: 400 }}&gt;&#13;&#10;            &lt;Box style={{ flexDirection: 'row', alignItems: 'flex-end', gap: 12 }}&gt;&#13;&#10;                &lt;Text style={{ fontSize: 96, fontWeight: 'bold', color: '#F0ABFC', lineHeight: 1 }}&gt;9&lt;/Text&gt;&#13;&#10;                &lt;Text style={{ fontSize: 18, color: '#94A3B8', marginBottom: 14 }}&gt;条结构化草稿&lt;/Text&gt;&#13;&#10;            &lt;/Box&gt;&#13;&#10;            &lt;Text style={{ fontSize: 18, color: '#E2E8F0', lineHeight: 1.6, marginTop: 8 }}&gt;&#13;&#10;                从一段 &lt;span style={{ color: '#22D3EE', fontWeight: 'bold' }}&gt;472 字&lt;/span&gt;的班级群消息里解析出来，&#13;&#10;                每条都带类型、优先级、开始/截止、地点、标签。&#13;&#10;            &lt;/Text&gt;&#13;&#10;&#13;&#10;            &lt;Box style={{ gap: 14, marginTop: 22 }}&gt;&#13;&#10;                &lt;Box style={{ flexDirection: 'row', gap: 12 }}&gt;&#13;&#10;                    &lt;Box style={{ width: 28, height: 28, borderRadius: 14, background: '#4F46E5' }} /&gt;&#13;&#10;                    &lt;Text style={{ fontSize: 18, color: '#E2E8F0', lineHeight: 1.5, flex: 1 }}&gt;&#13;&#10;                        模型没把握的字段&lt;span style={{ color: '#F0ABFC' }}&gt;标黄&lt;/span&gt;，提醒你重点看这几处&#13;&#10;                    &lt;/Text&gt;&#13;&#10;                &lt;/Box&gt;&#13;&#10;                &lt;Box style={{ flexDirection: 'row', gap: 12 }}&gt;&#13;&#10;                    &lt;Box style={{ width: 28, height: 28, borderRadius: 14, background: '#22D3EE' }} /&gt;&#13;&#10;                    &lt;Text style={{ fontSize: 18, color: '#E2E8F0', lineHeight: 1.5, flex: 1 }}&gt;&#13;&#10;                        左原文右字段对照改，可&quot;丢弃 / 保存修改 / 确认并加入&quot;&#13;&#10;                    &lt;/Text&gt;&#13;&#10;                &lt;/Box&gt;&#13;&#10;                &lt;Box style={{ flexDirection: 'row', gap: 12 }}&gt;&#13;&#10;                    &lt;Box style={{ width: 28, height: 28, borderRadius: 14, background: '#F0ABFC' }} /&gt;&#13;&#10;                    &lt;Text style={{ fontSize: 18, color: '#E2E8F0', lineHeight: 1.5, flex: 1 }}&gt;&#13;&#10;                        不确认就不入库 —— AI 全程只写草稿箱&#13;&#10;                    &lt;/Text&gt;&#13;&#10;                &lt;/Box&gt;&#13;&#10;            &lt;/Box&gt;&#13;&#10;        &lt;/Box&gt;&#13;&#10;&#13;&#10;        &lt;Box style={{ width: 700 }}&gt;&#13;&#10;            &lt;Image src=&quot;assets/drafts.png&quot; style={{ width: 700, height: 300, objectFit: 'cover', borderRadius: 8, border: '1px solid #334155' }} /&gt;&#13;&#10;            &lt;Box style={{ flexDirection: 'row', gap: 16, marginTop: 12 }}&gt;&#13;&#10;                &lt;Image src=&quot;assets/inbox-input.png&quot; style={{ width: 340, height: 140, objectFit: 'cover', borderRadius: 8, border: '1px solid #334155' }} /&gt;&#13;&#10;                &lt;Image src=&quot;assets/inbox-item.png&quot; style={{ width: 340, height: 140, objectFit: 'cover', borderRadius: 8, border: '1px solid #334155' }} /&gt;&#13;&#10;            &lt;/Box&gt;&#13;&#10;        &lt;/Box&gt;&#13;&#10;    &lt;/Box&gt;&#13;&#10;&#13;&#10;    &lt;Box style={{ marginTop: 16, padding: 16, background: '#151B33', borderRadius: 8, borderLeft: '3px solid #22D3EE' }}&gt;&#13;&#10;        &lt;Text style={{ fontSize: 18, color: '#E2E8F0', lineHeight: 1.5 }}&gt;&#13;&#10;            &lt;span style={{ fontWeight: 'bold', color: '#22D3EE' }}&gt;价值&lt;/span&gt;&#13;&#10;            ：原本要手打 9 条日程、逐条填时间和地点，现在只需要粘贴 + 点确认 —— 而且不会漏掉&quot;面试要带简历&quot;这种藏在段落中间的截止点。&#13;&#10;        &lt;/Text&gt;&#13;&#10;    &lt;/Box&gt;&#13;&#10;&#13;&#10;    &lt;Text style={{ fontSize: 14, color: '#64748B', position: 'absolute', left: 60, top: 670 }}&gt;个人工作台 · v0.2.0&lt;/Text&gt;&#13;&#10;&lt;/Slide&gt;&#13;&#10;"/>
         <p:cNvGrpSpPr/>
         <p:nvPr/>
       </p:nvGrpSpPr>
@@ -14936,7 +15211,7 @@
       </p:grpSpPr>
       <p:sp>
         <p:nvSpPr>
-          <p:cNvPr id="282" name=""/>
+          <p:cNvPr id="289" name=""/>
           <p:cNvSpPr/>
           <p:nvPr/>
         </p:nvSpPr>
@@ -14960,7 +15235,7 @@
       </p:sp>
       <p:sp>
         <p:nvSpPr>
-          <p:cNvPr id="283" name="" descr="{&quot;isTemplate&quot;:true,&quot;type&quot;:&quot;text&quot;}"/>
+          <p:cNvPr id="290" name="" descr="{&quot;isTemplate&quot;:true,&quot;type&quot;:&quot;text&quot;}"/>
           <p:cNvSpPr txBox="1"/>
           <p:nvPr/>
         </p:nvSpPr>
@@ -15015,7 +15290,7 @@
       </p:sp>
       <p:sp>
         <p:nvSpPr>
-          <p:cNvPr id="284" name="" descr="{&quot;isTemplate&quot;:true,&quot;type&quot;:&quot;text&quot;}"/>
+          <p:cNvPr id="291" name="" descr="{&quot;isTemplate&quot;:true,&quot;type&quot;:&quot;text&quot;}"/>
           <p:cNvSpPr txBox="1"/>
           <p:nvPr/>
         </p:nvSpPr>
@@ -15060,7 +15335,7 @@
       </p:sp>
       <p:sp>
         <p:nvSpPr>
-          <p:cNvPr id="285" name=""/>
+          <p:cNvPr id="292" name=""/>
           <p:cNvSpPr/>
           <p:nvPr/>
         </p:nvSpPr>
@@ -15086,7 +15361,7 @@
       </p:sp>
       <p:sp>
         <p:nvSpPr>
-          <p:cNvPr id="286" name="" descr="{&quot;isTemplate&quot;:true,&quot;type&quot;:&quot;text&quot;}"/>
+          <p:cNvPr id="293" name="" descr="{&quot;isTemplate&quot;:true,&quot;type&quot;:&quot;text&quot;}"/>
           <p:cNvSpPr txBox="1"/>
           <p:nvPr/>
         </p:nvSpPr>
@@ -15121,7 +15396,7 @@
       </p:sp>
       <p:sp>
         <p:nvSpPr>
-          <p:cNvPr id="287" name="" descr="{&quot;isTemplate&quot;:true,&quot;type&quot;:&quot;text&quot;}"/>
+          <p:cNvPr id="294" name="" descr="{&quot;isTemplate&quot;:true,&quot;type&quot;:&quot;text&quot;}"/>
           <p:cNvSpPr txBox="1"/>
           <p:nvPr/>
         </p:nvSpPr>
@@ -15156,7 +15431,7 @@
       </p:sp>
       <p:sp>
         <p:nvSpPr>
-          <p:cNvPr id="288" name="" descr="{&quot;isTemplate&quot;:true,&quot;type&quot;:&quot;text&quot;}"/>
+          <p:cNvPr id="295" name="" descr="{&quot;isTemplate&quot;:true,&quot;type&quot;:&quot;text&quot;}"/>
           <p:cNvSpPr txBox="1"/>
           <p:nvPr/>
         </p:nvSpPr>
@@ -15273,7 +15548,7 @@
       </p:sp>
       <p:sp>
         <p:nvSpPr>
-          <p:cNvPr id="289" name=""/>
+          <p:cNvPr id="296" name=""/>
           <p:cNvSpPr/>
           <p:nvPr/>
         </p:nvSpPr>
@@ -15299,7 +15574,7 @@
       </p:sp>
       <p:sp>
         <p:nvSpPr>
-          <p:cNvPr id="290" name="" descr="{&quot;isTemplate&quot;:true,&quot;type&quot;:&quot;text&quot;}"/>
+          <p:cNvPr id="297" name="" descr="{&quot;isTemplate&quot;:true,&quot;type&quot;:&quot;text&quot;}"/>
           <p:cNvSpPr txBox="1"/>
           <p:nvPr/>
         </p:nvSpPr>
@@ -15354,7 +15629,7 @@
       </p:sp>
       <p:sp>
         <p:nvSpPr>
-          <p:cNvPr id="291" name=""/>
+          <p:cNvPr id="298" name=""/>
           <p:cNvSpPr/>
           <p:nvPr/>
         </p:nvSpPr>
@@ -15380,7 +15655,7 @@
       </p:sp>
       <p:sp>
         <p:nvSpPr>
-          <p:cNvPr id="292" name="" descr="{&quot;isTemplate&quot;:true,&quot;type&quot;:&quot;text&quot;}"/>
+          <p:cNvPr id="299" name="" descr="{&quot;isTemplate&quot;:true,&quot;type&quot;:&quot;text&quot;}"/>
           <p:cNvSpPr txBox="1"/>
           <p:nvPr/>
         </p:nvSpPr>
@@ -15487,7 +15762,7 @@
       </p:sp>
       <p:sp>
         <p:nvSpPr>
-          <p:cNvPr id="293" name=""/>
+          <p:cNvPr id="300" name=""/>
           <p:cNvSpPr/>
           <p:nvPr/>
         </p:nvSpPr>
@@ -15513,7 +15788,7 @@
       </p:sp>
       <p:sp>
         <p:nvSpPr>
-          <p:cNvPr id="294" name="" descr="{&quot;isTemplate&quot;:true,&quot;type&quot;:&quot;text&quot;}"/>
+          <p:cNvPr id="301" name="" descr="{&quot;isTemplate&quot;:true,&quot;type&quot;:&quot;text&quot;}"/>
           <p:cNvSpPr txBox="1"/>
           <p:nvPr/>
         </p:nvSpPr>
@@ -15568,7 +15843,7 @@
       </p:sp>
       <p:sp>
         <p:nvSpPr>
-          <p:cNvPr id="295" name=""/>
+          <p:cNvPr id="302" name=""/>
           <p:cNvSpPr/>
           <p:nvPr/>
         </p:nvSpPr>
@@ -15594,7 +15869,7 @@
       </p:sp>
       <p:pic>
         <p:nvPicPr>
-          <p:cNvPr id="296" name=""/>
+          <p:cNvPr id="303" name=""/>
           <p:cNvPicPr>
             <a:picLocks noChangeAspect="1"/>
           </p:cNvPicPr>
@@ -15622,7 +15897,7 @@
       </p:pic>
       <p:sp>
         <p:nvSpPr>
-          <p:cNvPr id="297" name=""/>
+          <p:cNvPr id="304" name=""/>
           <p:cNvSpPr/>
           <p:nvPr/>
         </p:nvSpPr>
@@ -15648,7 +15923,7 @@
       </p:sp>
       <p:pic>
         <p:nvPicPr>
-          <p:cNvPr id="298" name=""/>
+          <p:cNvPr id="305" name=""/>
           <p:cNvPicPr>
             <a:picLocks noChangeAspect="1"/>
           </p:cNvPicPr>
@@ -15676,7 +15951,7 @@
       </p:pic>
       <p:sp>
         <p:nvSpPr>
-          <p:cNvPr id="299" name=""/>
+          <p:cNvPr id="306" name=""/>
           <p:cNvSpPr/>
           <p:nvPr/>
         </p:nvSpPr>
@@ -15702,7 +15977,7 @@
       </p:sp>
       <p:pic>
         <p:nvPicPr>
-          <p:cNvPr id="300" name=""/>
+          <p:cNvPr id="307" name=""/>
           <p:cNvPicPr>
             <a:picLocks noChangeAspect="1"/>
           </p:cNvPicPr>
@@ -15730,7 +16005,7 @@
       </p:pic>
       <p:sp>
         <p:nvSpPr>
-          <p:cNvPr id="301" name=""/>
+          <p:cNvPr id="308" name=""/>
           <p:cNvSpPr/>
           <p:nvPr/>
         </p:nvSpPr>
@@ -15756,7 +16031,7 @@
       </p:sp>
       <p:sp>
         <p:nvSpPr>
-          <p:cNvPr id="302" name=""/>
+          <p:cNvPr id="309" name=""/>
           <p:cNvSpPr/>
           <p:nvPr/>
         </p:nvSpPr>
@@ -15813,7 +16088,7 @@
       </p:sp>
       <p:sp>
         <p:nvSpPr>
-          <p:cNvPr id="303" name="" descr="{&quot;isTemplate&quot;:true,&quot;type&quot;:&quot;text&quot;}"/>
+          <p:cNvPr id="310" name="" descr="{&quot;isTemplate&quot;:true,&quot;type&quot;:&quot;text&quot;}"/>
           <p:cNvSpPr txBox="1"/>
           <p:nvPr/>
         </p:nvSpPr>
@@ -15958,7 +16233,7 @@
       </p:sp>
       <p:sp>
         <p:nvSpPr>
-          <p:cNvPr id="304" name="" descr="{&quot;isTemplate&quot;:true,&quot;type&quot;:&quot;text&quot;}"/>
+          <p:cNvPr id="311" name="" descr="{&quot;isTemplate&quot;:true,&quot;type&quot;:&quot;text&quot;}"/>
           <p:cNvSpPr txBox="1"/>
           <p:nvPr/>
         </p:nvSpPr>
@@ -16011,7 +16286,7 @@
   <p:cSld>
     <p:spTree>
       <p:nvGrpSpPr>
-        <p:cNvPr id="305" name="" descr="&lt;Slide style={{ background: '#0B1020', padding: 60 }}&gt;&#10;    &lt;Box style={{ flexDirection: 'row', justifyContent: 'space-between', alignItems: 'flex-end' }}&gt;&#10;        &lt;Text style={{ fontSize: 34, fontWeight: 'bold', color: '#FFFFFF' }}&gt;结果与证据 · 三种检索，都能搜到信息流&lt;/Text&gt;&#10;        &lt;Text style={{ fontSize: 14, color: '#64748B' }}&gt;07 / 检索能力&lt;/Text&gt;&#10;    &lt;/Box&gt;&#10;    &lt;Box style={{ width: '100%', height: 1, background: 'rgba(34,211,238,0.4)', marginTop: 14 }} /&gt;&#10;&#10;    &lt;Box style={{ flexDirection: 'row', gap: 20, marginTop: 18 }}&gt;&#10;        &lt;Box style={{ flex: 1 }}&gt;&#10;            &lt;Text style={{ fontSize: 20, fontWeight: 'bold', color: '#22D3EE' }}&gt;全文&lt;/Text&gt;&#10;            &lt;Image src=&quot;assets/search-fulltext.png&quot; style={{ width: 373, height: 225, objectFit: 'cover', borderRadius: 8, border: '1px solid #334155', marginTop: 8 }} /&gt;&#10;        &lt;/Box&gt;&#10;        &lt;Box style={{ flex: 1 }}&gt;&#10;            &lt;Text style={{ fontSize: 20, fontWeight: 'bold', color: '#22D3EE' }}&gt;语义&lt;/Text&gt;&#10;            &lt;Image src=&quot;assets/semantic.png&quot; style={{ width: 373, height: 225, objectFit: 'cover', borderRadius: 8, border: '1px solid #334155', marginTop: 8 }} /&gt;&#10;        &lt;/Box&gt;&#10;        &lt;Box style={{ flex: 1 }}&gt;&#10;            &lt;Text style={{ fontSize: 20, fontWeight: 'bold', color: '#F0ABFC' }}&gt;问答（真实 Key）&lt;/Text&gt;&#10;            &lt;Image src=&quot;assets/search-ask-real.png&quot; style={{ width: 373, height: 225, objectFit: 'cover', borderRadius: 8, border: '1px solid #334155', marginTop: 8 }} /&gt;&#10;        &lt;/Box&gt;&#10;    &lt;/Box&gt;&#10;&#10;    &lt;Box style={{ marginTop: 16, padding: 16, background: '#151B33', borderRadius: 8 }}&gt;&#10;        &lt;Box style={{ flexDirection: 'row', gap: 24 }}&gt;&#10;            &lt;Box style={{ flex: 1 }}&gt;&#10;                &lt;Text style={{ fontSize: 18, color: '#E2E8F0', lineHeight: 1.5 }}&gt;&#10;                    &lt;span style={{ fontWeight: 'bold', color: '#22D3EE' }}&gt;全文&lt;/span&gt;：2-gram + 前缀 + 模糊；&#10;                    命中太少自动放宽为 OR。搜&quot;班费&quot;直中那条班级事务。&#10;                &lt;/Text&gt;&#10;            &lt;/Box&gt;&#10;            &lt;Box style={{ flex: 1 }}&gt;&#10;                &lt;Text style={{ fontSize: 18, color: '#E2E8F0', lineHeight: 1.5 }}&gt;&#10;                    &lt;span style={{ fontWeight: 'bold', color: '#22D3EE' }}&gt;语义&lt;/span&gt;：离线 512 维向量；&#10;                    搜&quot;新生入学要准备什么&quot;命中体检须知、选课通知，相似度 51%–56%。&#10;                &lt;/Text&gt;&#10;            &lt;/Box&gt;&#10;            &lt;Box style={{ flex: 1 }}&gt;&#10;                &lt;Text style={{ fontSize: 18, color: '#E2E8F0', lineHeight: 1.5 }}&gt;&#10;                    &lt;span style={{ fontWeight: 'bold', color: '#F0ABFC' }}&gt;问答&lt;/span&gt;：问&quot;选课通知说了什么&quot;&#10;                    → 直接命中 1 条 + 3 条引用，答案里带 [1][2] 可点开核对。&#10;                &lt;/Text&gt;&#10;            &lt;/Box&gt;&#10;        &lt;/Box&gt;&#10;    &lt;/Box&gt;&#10;&#10;    &lt;Box style={{ marginTop: 14, padding: 16, background: 'linear-gradient(120deg, #4F46E5 0%, #151B33 100%)', borderRadius: 8 }}&gt;&#10;        &lt;Text style={{ fontSize: 18, color: '#FFFFFF', lineHeight: 1.5 }}&gt;&#10;            &lt;span style={{ fontWeight: 'bold', color: '#F0ABFC' }}&gt;三者是上下游，不是替代&lt;/span&gt;&#10;            ：问答的召回质量取决于本地检索，而语义补的正是&quot;字面不同但意思相近&quot;这一段 —— 三种共用一套搜索范围（默认日程+笔记）。&#10;        &lt;/Text&gt;&#10;    &lt;/Box&gt;&#10;&#10;    &lt;Text style={{ fontSize: 14, color: '#64748B', position: 'absolute', left: 60, top: 670 }}&gt;个人工作台 · v0.2.0&lt;/Text&gt;&#10;&lt;/Slide&gt;&#10;"/>
+        <p:cNvPr id="312" name="" descr="&lt;Slide style={{ background: '#0B1020', padding: 60 }}&gt;&#10;    &lt;Box style={{ flexDirection: 'row', justifyContent: 'space-between', alignItems: 'flex-end' }}&gt;&#10;        &lt;Text style={{ fontSize: 34, fontWeight: 'bold', color: '#FFFFFF' }}&gt;结果与证据 · 三种检索，都能搜到信息流&lt;/Text&gt;&#10;        &lt;Text style={{ fontSize: 14, color: '#64748B' }}&gt;07 / 检索能力&lt;/Text&gt;&#10;    &lt;/Box&gt;&#10;    &lt;Box style={{ width: '100%', height: 1, background: 'rgba(34,211,238,0.4)', marginTop: 14 }} /&gt;&#10;&#10;    &lt;Box style={{ flexDirection: 'row', gap: 20, marginTop: 18 }}&gt;&#10;        &lt;Box style={{ flex: 1 }}&gt;&#10;            &lt;Text style={{ fontSize: 20, fontWeight: 'bold', color: '#22D3EE' }}&gt;全文&lt;/Text&gt;&#10;            &lt;Image src=&quot;assets/search-fulltext.png&quot; style={{ width: 373, height: 225, objectFit: 'cover', borderRadius: 8, border: '1px solid #334155', marginTop: 8 }} /&gt;&#10;        &lt;/Box&gt;&#10;        &lt;Box style={{ flex: 1 }}&gt;&#10;            &lt;Text style={{ fontSize: 20, fontWeight: 'bold', color: '#22D3EE' }}&gt;语义&lt;/Text&gt;&#10;            &lt;Image src=&quot;assets/semantic.png&quot; style={{ width: 373, height: 225, objectFit: 'cover', borderRadius: 8, border: '1px solid #334155', marginTop: 8 }} /&gt;&#10;        &lt;/Box&gt;&#10;        &lt;Box style={{ flex: 1 }}&gt;&#10;            &lt;Text style={{ fontSize: 20, fontWeight: 'bold', color: '#F0ABFC' }}&gt;问答（真实 Key）&lt;/Text&gt;&#10;            &lt;Image src=&quot;assets/search-ask-real.png&quot; style={{ width: 373, height: 225, objectFit: 'cover', borderRadius: 8, border: '1px solid #334155', marginTop: 8 }} /&gt;&#10;        &lt;/Box&gt;&#10;    &lt;/Box&gt;&#10;&#10;    &lt;Box style={{ marginTop: 16, padding: 16, background: '#151B33', borderRadius: 8 }}&gt;&#10;        &lt;Box style={{ flexDirection: 'row', gap: 24 }}&gt;&#10;            &lt;Box style={{ flex: 1 }}&gt;&#10;                &lt;Text style={{ fontSize: 18, color: '#E2E8F0', lineHeight: 1.5 }}&gt;&#10;                    &lt;span style={{ fontWeight: 'bold', color: '#22D3EE' }}&gt;全文&lt;/span&gt;：2-gram + 前缀 + 模糊；&#10;                    命中太少自动放宽为 OR。搜&quot;班费&quot;直中那条班级事务。&#10;                &lt;/Text&gt;&#10;            &lt;/Box&gt;&#10;            &lt;Box style={{ flex: 1 }}&gt;&#10;                &lt;Text style={{ fontSize: 18, color: '#E2E8F0', lineHeight: 1.5 }}&gt;&#10;                    &lt;span style={{ fontWeight: 'bold', color: '#22D3EE' }}&gt;语义&lt;/span&gt;：离线 512 维向量；&#10;                    搜&quot;新生入学要准备什么&quot;命中体检须知、选课通知，相似度 51%–56%。&#10;                &lt;/Text&gt;&#10;            &lt;/Box&gt;&#10;            &lt;Box style={{ flex: 1 }}&gt;&#10;                &lt;Text style={{ fontSize: 18, color: '#E2E8F0', lineHeight: 1.5 }}&gt;&#10;                    &lt;span style={{ fontWeight: 'bold', color: '#F0ABFC' }}&gt;问答&lt;/span&gt;：问&quot;选课通知说了什么&quot;&#10;                    → 直接命中 1 条 + 3 条引用，答案里带 [1][2] 可点开核对。&#10;                &lt;/Text&gt;&#10;            &lt;/Box&gt;&#10;        &lt;/Box&gt;&#10;    &lt;/Box&gt;&#10;&#10;    &lt;Box style={{ marginTop: 14, padding: 16, background: 'linear-gradient(120deg, #4F46E5 0%, #151B33 100%)', borderRadius: 8 }}&gt;&#10;        &lt;Text style={{ fontSize: 18, color: '#FFFFFF', lineHeight: 1.5 }}&gt;&#10;            &lt;span style={{ fontWeight: 'bold', color: '#F0ABFC' }}&gt;三者是上下游，不是替代&lt;/span&gt;&#10;            ：问答的召回质量取决于本地检索，而语义补的正是&quot;字面不同但意思相近&quot;这一段 —— 三种共用一套搜索范围（默认日程+笔记）。&#10;        &lt;/Text&gt;&#10;    &lt;/Box&gt;&#10;&#10;    &lt;Text style={{ fontSize: 14, color: '#64748B', position: 'absolute', left: 60, top: 670 }}&gt;个人工作台 · v0.2.0&lt;/Text&gt;&#10;&lt;/Slide&gt;&#10;"/>
         <p:cNvGrpSpPr/>
         <p:nvPr/>
       </p:nvGrpSpPr>
@@ -16025,7 +16300,7 @@
       </p:grpSpPr>
       <p:sp>
         <p:nvSpPr>
-          <p:cNvPr id="306" name=""/>
+          <p:cNvPr id="313" name=""/>
           <p:cNvSpPr/>
           <p:nvPr/>
         </p:nvSpPr>
@@ -16049,7 +16324,7 @@
       </p:sp>
       <p:sp>
         <p:nvSpPr>
-          <p:cNvPr id="307" name="" descr="{&quot;isTemplate&quot;:true,&quot;type&quot;:&quot;text&quot;}"/>
+          <p:cNvPr id="314" name="" descr="{&quot;isTemplate&quot;:true,&quot;type&quot;:&quot;text&quot;}"/>
           <p:cNvSpPr txBox="1"/>
           <p:nvPr/>
         </p:nvSpPr>
@@ -16104,7 +16379,7 @@
       </p:sp>
       <p:sp>
         <p:nvSpPr>
-          <p:cNvPr id="308" name="" descr="{&quot;isTemplate&quot;:true,&quot;type&quot;:&quot;text&quot;}"/>
+          <p:cNvPr id="315" name="" descr="{&quot;isTemplate&quot;:true,&quot;type&quot;:&quot;text&quot;}"/>
           <p:cNvSpPr txBox="1"/>
           <p:nvPr/>
         </p:nvSpPr>
@@ -16149,7 +16424,7 @@
       </p:sp>
       <p:sp>
         <p:nvSpPr>
-          <p:cNvPr id="309" name=""/>
+          <p:cNvPr id="316" name=""/>
           <p:cNvSpPr/>
           <p:nvPr/>
         </p:nvSpPr>
@@ -16175,7 +16450,7 @@
       </p:sp>
       <p:sp>
         <p:nvSpPr>
-          <p:cNvPr id="310" name="" descr="{&quot;isTemplate&quot;:true,&quot;type&quot;:&quot;text&quot;}"/>
+          <p:cNvPr id="317" name="" descr="{&quot;isTemplate&quot;:true,&quot;type&quot;:&quot;text&quot;}"/>
           <p:cNvSpPr txBox="1"/>
           <p:nvPr/>
         </p:nvSpPr>
@@ -16210,7 +16485,7 @@
       </p:sp>
       <p:sp>
         <p:nvSpPr>
-          <p:cNvPr id="311" name=""/>
+          <p:cNvPr id="318" name=""/>
           <p:cNvSpPr/>
           <p:nvPr/>
         </p:nvSpPr>
@@ -16236,7 +16511,7 @@
       </p:sp>
       <p:pic>
         <p:nvPicPr>
-          <p:cNvPr id="312" name=""/>
+          <p:cNvPr id="319" name=""/>
           <p:cNvPicPr>
             <a:picLocks noChangeAspect="1"/>
           </p:cNvPicPr>
@@ -16264,7 +16539,7 @@
       </p:pic>
       <p:sp>
         <p:nvSpPr>
-          <p:cNvPr id="313" name="" descr="{&quot;isTemplate&quot;:true,&quot;type&quot;:&quot;text&quot;}"/>
+          <p:cNvPr id="320" name="" descr="{&quot;isTemplate&quot;:true,&quot;type&quot;:&quot;text&quot;}"/>
           <p:cNvSpPr txBox="1"/>
           <p:nvPr/>
         </p:nvSpPr>
@@ -16299,7 +16574,7 @@
       </p:sp>
       <p:sp>
         <p:nvSpPr>
-          <p:cNvPr id="314" name=""/>
+          <p:cNvPr id="321" name=""/>
           <p:cNvSpPr/>
           <p:nvPr/>
         </p:nvSpPr>
@@ -16325,7 +16600,7 @@
       </p:sp>
       <p:pic>
         <p:nvPicPr>
-          <p:cNvPr id="315" name=""/>
+          <p:cNvPr id="322" name=""/>
           <p:cNvPicPr>
             <a:picLocks noChangeAspect="1"/>
           </p:cNvPicPr>
@@ -16353,7 +16628,7 @@
       </p:pic>
       <p:sp>
         <p:nvSpPr>
-          <p:cNvPr id="316" name="" descr="{&quot;isTemplate&quot;:true,&quot;type&quot;:&quot;text&quot;}"/>
+          <p:cNvPr id="323" name="" descr="{&quot;isTemplate&quot;:true,&quot;type&quot;:&quot;text&quot;}"/>
           <p:cNvSpPr txBox="1"/>
           <p:nvPr/>
         </p:nvSpPr>
@@ -16408,7 +16683,7 @@
       </p:sp>
       <p:sp>
         <p:nvSpPr>
-          <p:cNvPr id="317" name=""/>
+          <p:cNvPr id="324" name=""/>
           <p:cNvSpPr/>
           <p:nvPr/>
         </p:nvSpPr>
@@ -16434,7 +16709,7 @@
       </p:sp>
       <p:pic>
         <p:nvPicPr>
-          <p:cNvPr id="318" name=""/>
+          <p:cNvPr id="325" name=""/>
           <p:cNvPicPr>
             <a:picLocks noChangeAspect="1"/>
           </p:cNvPicPr>
@@ -16462,7 +16737,7 @@
       </p:pic>
       <p:sp>
         <p:nvSpPr>
-          <p:cNvPr id="319" name=""/>
+          <p:cNvPr id="326" name=""/>
           <p:cNvSpPr/>
           <p:nvPr/>
         </p:nvSpPr>
@@ -16488,7 +16763,7 @@
       </p:sp>
       <p:sp>
         <p:nvSpPr>
-          <p:cNvPr id="320" name="" descr="{&quot;isTemplate&quot;:true,&quot;type&quot;:&quot;text&quot;}"/>
+          <p:cNvPr id="327" name="" descr="{&quot;isTemplate&quot;:true,&quot;type&quot;:&quot;text&quot;}"/>
           <p:cNvSpPr txBox="1"/>
           <p:nvPr/>
         </p:nvSpPr>
@@ -16655,7 +16930,7 @@
       </p:sp>
       <p:sp>
         <p:nvSpPr>
-          <p:cNvPr id="321" name="" descr="{&quot;isTemplate&quot;:true,&quot;type&quot;:&quot;text&quot;}"/>
+          <p:cNvPr id="328" name="" descr="{&quot;isTemplate&quot;:true,&quot;type&quot;:&quot;text&quot;}"/>
           <p:cNvSpPr txBox="1"/>
           <p:nvPr/>
         </p:nvSpPr>
@@ -16802,7 +17077,7 @@
       </p:sp>
       <p:sp>
         <p:nvSpPr>
-          <p:cNvPr id="322" name="" descr="{&quot;isTemplate&quot;:true,&quot;type&quot;:&quot;text&quot;}"/>
+          <p:cNvPr id="329" name="" descr="{&quot;isTemplate&quot;:true,&quot;type&quot;:&quot;text&quot;}"/>
           <p:cNvSpPr txBox="1"/>
           <p:nvPr/>
         </p:nvSpPr>
@@ -16949,7 +17224,7 @@
       </p:sp>
       <p:sp>
         <p:nvSpPr>
-          <p:cNvPr id="323" name=""/>
+          <p:cNvPr id="330" name=""/>
           <p:cNvSpPr/>
           <p:nvPr/>
         </p:nvSpPr>
@@ -16983,7 +17258,7 @@
       </p:sp>
       <p:sp>
         <p:nvSpPr>
-          <p:cNvPr id="324" name="" descr="{&quot;isTemplate&quot;:true,&quot;type&quot;:&quot;text&quot;}"/>
+          <p:cNvPr id="331" name="" descr="{&quot;isTemplate&quot;:true,&quot;type&quot;:&quot;text&quot;}"/>
           <p:cNvSpPr txBox="1"/>
           <p:nvPr/>
         </p:nvSpPr>
@@ -17110,7 +17385,7 @@
       </p:sp>
       <p:sp>
         <p:nvSpPr>
-          <p:cNvPr id="325" name="" descr="{&quot;isTemplate&quot;:true,&quot;type&quot;:&quot;text&quot;}"/>
+          <p:cNvPr id="332" name="" descr="{&quot;isTemplate&quot;:true,&quot;type&quot;:&quot;text&quot;}"/>
           <p:cNvSpPr txBox="1"/>
           <p:nvPr/>
         </p:nvSpPr>
@@ -17163,7 +17438,7 @@
   <p:cSld>
     <p:spTree>
       <p:nvGrpSpPr>
-        <p:cNvPr id="326" name="" descr="&lt;Slide style={{ background: '#0B1020', padding: 60 }}&gt;&#10;    &lt;Box style={{ flexDirection: 'row', justifyContent: 'space-between', alignItems: 'flex-end' }}&gt;&#10;        &lt;Text style={{ fontSize: 34, fontWeight: 'bold', color: '#FFFFFF' }}&gt;结果与证据 · 信息流：抓得来，也搜得到正文&lt;/Text&gt;&#10;        &lt;Text style={{ fontSize: 14, color: '#64748B' }}&gt;08 / 聚合与正文入库&lt;/Text&gt;&#10;    &lt;/Box&gt;&#10;    &lt;Box style={{ width: '100%', height: 1, background: 'rgba(34,211,238,0.4)', marginTop: 14 }} /&gt;&#10;&#10;    &lt;Box style={{ flexDirection: 'row', gap: 32, marginTop: 18 }}&gt;&#10;        &lt;Box style={{ width: 340 }}&gt;&#10;            &lt;Box style={{ flexDirection: 'row', alignItems: 'flex-end', gap: 8 }}&gt;&#10;                &lt;Text style={{ fontSize: 96, fontWeight: 'bold', color: '#F0ABFC', lineHeight: 1 }}&gt;60&lt;/Text&gt;&#10;                &lt;Text style={{ fontSize: 22, color: '#94A3B8', marginBottom: 16 }}&gt;/ 75 条有正文&lt;/Text&gt;&#10;            &lt;/Box&gt;&#10;            &lt;Text style={{ fontSize: 18, color: '#E2E8F0', lineHeight: 1.6, marginTop: 10 }}&gt;&#10;                共 &lt;span style={{ color: '#22D3EE', fontWeight: 'bold' }}&gt;8.3 万字&lt;/span&gt;，&#10;                平均每条 1,447 字 —— 这些正文全部进了搜索索引。&#10;            &lt;/Text&gt;&#10;            &lt;Box style={{ gap: 12, marginTop: 20 }}&gt;&#10;                &lt;Text style={{ fontSize: 18, color: '#E2E8F0', lineHeight: 1.5 }}&gt;&#10;                    &lt;span style={{ color: '#22D3EE', fontWeight: 'bold' }}&gt;RSS 源零额外请求&lt;/span&gt;：直接取 feed 自带的全文字段&#10;                &lt;/Text&gt;&#10;                &lt;Text style={{ fontSize: 18, color: '#E2E8F0', lineHeight: 1.5 }}&gt;&#10;                    &lt;span style={{ color: '#22D3EE', fontWeight: 'bold' }}&gt;网页源限速抓详情&lt;/span&gt;：每域名 1.5 秒，62 条约 2 分钟&#10;                &lt;/Text&gt;&#10;                &lt;Text style={{ fontSize: 18, color: '#E2E8F0', lineHeight: 1.5 }}&gt;&#10;                    &lt;span style={{ color: '#94A3B8' }}&gt;没拿到的 15 条&lt;/span&gt;：13 条 robots 不允许 + 2 条 PDF 附件，标记为失败不重试&#10;                &lt;/Text&gt;&#10;            &lt;/Box&gt;&#10;        &lt;/Box&gt;&#10;&#10;        &lt;Box style={{ width: 740 }}&gt;&#10;            &lt;Image src=&quot;assets/feed-list.png&quot; style={{ width: 740, height: 300, objectFit: 'cover', borderRadius: 8, border: '1px solid #334155' }} /&gt;&#10;            &lt;Box style={{ flexDirection: 'row', gap: 16, marginTop: 12 }}&gt;&#10;                &lt;Image src=&quot;assets/feed-ai-summary.png&quot; style={{ width: 362, height: 135, objectFit: 'cover', borderRadius: 8, border: '1px solid #334155' }} /&gt;&#10;                &lt;Image src=&quot;assets/feed-article.jpg&quot; style={{ width: 362, height: 135, objectFit: 'cover', borderRadius: 8, border: '1px solid #334155' }} /&gt;&#10;            &lt;/Box&gt;&#10;        &lt;/Box&gt;&#10;    &lt;/Box&gt;&#10;&#10;    &lt;Box style={{ marginTop: 14, padding: 16, background: '#151B33', borderRadius: 8, borderLeft: '3px solid #22D3EE' }}&gt;&#10;        &lt;Text style={{ fontSize: 18, color: '#E2E8F0', lineHeight: 1.5 }}&gt;&#10;            &lt;span style={{ fontWeight: 'bold', color: '#22D3EE' }}&gt;闭环&lt;/span&gt;&#10;            ：定时抓取 → 按栏目归类 → 自动补正文 → 进索引 → 三种检索都能命中；&#10;            点标题就地出 AI 摘要，「显示原文」在抽屉里渲染清洗过的正文。&#10;        &lt;/Text&gt;&#10;    &lt;/Box&gt;&#10;&#10;    &lt;Text style={{ fontSize: 14, color: '#64748B', position: 'absolute', left: 60, top: 670 }}&gt;个人工作台 · v0.2.0&lt;/Text&gt;&#10;&lt;/Slide&gt;&#10;"/>
+        <p:cNvPr id="333" name="" descr="&lt;Slide style={{ background: '#0B1020', padding: 60 }}&gt;&#10;    &lt;Box style={{ flexDirection: 'row', justifyContent: 'space-between', alignItems: 'flex-end' }}&gt;&#10;        &lt;Text style={{ fontSize: 34, fontWeight: 'bold', color: '#FFFFFF' }}&gt;结果与证据 · 信息流：抓得来，也搜得到正文&lt;/Text&gt;&#10;        &lt;Text style={{ fontSize: 14, color: '#64748B' }}&gt;08 / 聚合与正文入库&lt;/Text&gt;&#10;    &lt;/Box&gt;&#10;    &lt;Box style={{ width: '100%', height: 1, background: 'rgba(34,211,238,0.4)', marginTop: 14 }} /&gt;&#10;&#10;    &lt;Box style={{ flexDirection: 'row', gap: 32, marginTop: 18 }}&gt;&#10;        &lt;Box style={{ width: 340 }}&gt;&#10;            &lt;Box style={{ flexDirection: 'row', alignItems: 'flex-end', gap: 8 }}&gt;&#10;                &lt;Text style={{ fontSize: 96, fontWeight: 'bold', color: '#F0ABFC', lineHeight: 1 }}&gt;60&lt;/Text&gt;&#10;                &lt;Text style={{ fontSize: 22, color: '#94A3B8', marginBottom: 16 }}&gt;/ 75 条有正文&lt;/Text&gt;&#10;            &lt;/Box&gt;&#10;            &lt;Text style={{ fontSize: 18, color: '#E2E8F0', lineHeight: 1.6, marginTop: 10 }}&gt;&#10;                共 &lt;span style={{ color: '#22D3EE', fontWeight: 'bold' }}&gt;8.3 万字&lt;/span&gt;，&#10;                平均每条 1,447 字 —— 这些正文全部进了搜索索引。&#10;            &lt;/Text&gt;&#10;            &lt;Box style={{ gap: 12, marginTop: 20 }}&gt;&#10;                &lt;Text style={{ fontSize: 18, color: '#E2E8F0', lineHeight: 1.5 }}&gt;&#10;                    &lt;span style={{ color: '#22D3EE', fontWeight: 'bold' }}&gt;RSS 源零额外请求&lt;/span&gt;：直接取 feed 自带的全文字段&#10;                &lt;/Text&gt;&#10;                &lt;Text style={{ fontSize: 18, color: '#E2E8F0', lineHeight: 1.5 }}&gt;&#10;                    &lt;span style={{ color: '#22D3EE', fontWeight: 'bold' }}&gt;网页源限速抓详情&lt;/span&gt;：每域名 1.5 秒，62 条约 2 分钟&#10;                &lt;/Text&gt;&#10;                &lt;Text style={{ fontSize: 18, color: '#E2E8F0', lineHeight: 1.5 }}&gt;&#10;                    &lt;span style={{ color: '#94A3B8' }}&gt;没拿到的 15 条&lt;/span&gt;：13 条 robots 不允许 + 2 条 PDF 附件，标记为失败不重试&#10;                &lt;/Text&gt;&#10;            &lt;/Box&gt;&#10;        &lt;/Box&gt;&#10;&#10;        &lt;Box style={{ width: 740 }}&gt;&#10;            &lt;Image src=&quot;assets/feed-list.png&quot; style={{ width: 740, height: 300, objectFit: 'cover', borderRadius: 8, border: '1px solid #334155' }} /&gt;&#10;            &lt;Box style={{ flexDirection: 'row', gap: 16, marginTop: 12 }}&gt;&#10;                &lt;Image src=&quot;assets/feed-ai-summary.png&quot; style={{ width: 362, height: 135, objectFit: 'cover', borderRadius: 8, border: '1px solid #334155' }} /&gt;&#10;                &lt;Image src=&quot;assets/feed-article.jpg&quot; style={{ width: 362, height: 135, objectFit: 'cover', borderRadius: 8, border: '1px solid #334155' }} /&gt;&#10;            &lt;/Box&gt;&#10;        &lt;/Box&gt;&#10;    &lt;/Box&gt;&#10;&#10;    &lt;Box style={{ marginTop: 14, padding: 16, background: '#151B33', borderRadius: 8, borderLeft: '3px solid #22D3EE' }}&gt;&#10;        &lt;Text style={{ fontSize: 18, color: '#E2E8F0', lineHeight: 1.5 }}&gt;&#10;            &lt;span style={{ fontWeight: 'bold', color: '#22D3EE' }}&gt;闭环&lt;/span&gt;&#10;            ：定时抓取 → 按栏目归类 → 自动补正文 → 进索引 → 三种检索都能命中；&#10;            点标题就地出 AI 摘要，「显示原文」在抽屉里渲染清洗过的正文。&#10;        &lt;/Text&gt;&#10;    &lt;/Box&gt;&#10;&#10;    &lt;Text style={{ fontSize: 14, color: '#64748B', position: 'absolute', left: 60, top: 670 }}&gt;个人工作台 · v0.2.0&lt;/Text&gt;&#10;&lt;/Slide&gt;&#10;"/>
         <p:cNvGrpSpPr/>
         <p:nvPr/>
       </p:nvGrpSpPr>
@@ -17177,7 +17452,7 @@
       </p:grpSpPr>
       <p:sp>
         <p:nvSpPr>
-          <p:cNvPr id="327" name=""/>
+          <p:cNvPr id="334" name=""/>
           <p:cNvSpPr/>
           <p:nvPr/>
         </p:nvSpPr>
@@ -17201,7 +17476,7 @@
       </p:sp>
       <p:sp>
         <p:nvSpPr>
-          <p:cNvPr id="328" name="" descr="{&quot;isTemplate&quot;:true,&quot;type&quot;:&quot;text&quot;}"/>
+          <p:cNvPr id="335" name="" descr="{&quot;isTemplate&quot;:true,&quot;type&quot;:&quot;text&quot;}"/>
           <p:cNvSpPr txBox="1"/>
           <p:nvPr/>
         </p:nvSpPr>
@@ -17256,7 +17531,7 @@
       </p:sp>
       <p:sp>
         <p:nvSpPr>
-          <p:cNvPr id="329" name="" descr="{&quot;isTemplate&quot;:true,&quot;type&quot;:&quot;text&quot;}"/>
+          <p:cNvPr id="336" name="" descr="{&quot;isTemplate&quot;:true,&quot;type&quot;:&quot;text&quot;}"/>
           <p:cNvSpPr txBox="1"/>
           <p:nvPr/>
         </p:nvSpPr>
@@ -17301,7 +17576,7 @@
       </p:sp>
       <p:sp>
         <p:nvSpPr>
-          <p:cNvPr id="330" name=""/>
+          <p:cNvPr id="337" name=""/>
           <p:cNvSpPr/>
           <p:nvPr/>
         </p:nvSpPr>
@@ -17327,7 +17602,7 @@
       </p:sp>
       <p:sp>
         <p:nvSpPr>
-          <p:cNvPr id="331" name="" descr="{&quot;isTemplate&quot;:true,&quot;type&quot;:&quot;text&quot;}"/>
+          <p:cNvPr id="338" name="" descr="{&quot;isTemplate&quot;:true,&quot;type&quot;:&quot;text&quot;}"/>
           <p:cNvSpPr txBox="1"/>
           <p:nvPr/>
         </p:nvSpPr>
@@ -17362,7 +17637,7 @@
       </p:sp>
       <p:sp>
         <p:nvSpPr>
-          <p:cNvPr id="332" name="" descr="{&quot;isTemplate&quot;:true,&quot;type&quot;:&quot;text&quot;}"/>
+          <p:cNvPr id="339" name="" descr="{&quot;isTemplate&quot;:true,&quot;type&quot;:&quot;text&quot;}"/>
           <p:cNvSpPr txBox="1"/>
           <p:nvPr/>
         </p:nvSpPr>
@@ -17407,7 +17682,7 @@
       </p:sp>
       <p:sp>
         <p:nvSpPr>
-          <p:cNvPr id="333" name="" descr="{&quot;isTemplate&quot;:true,&quot;type&quot;:&quot;text&quot;}"/>
+          <p:cNvPr id="340" name="" descr="{&quot;isTemplate&quot;:true,&quot;type&quot;:&quot;text&quot;}"/>
           <p:cNvSpPr txBox="1"/>
           <p:nvPr/>
         </p:nvSpPr>
@@ -17544,7 +17819,7 @@
       </p:sp>
       <p:sp>
         <p:nvSpPr>
-          <p:cNvPr id="334" name="" descr="{&quot;isTemplate&quot;:true,&quot;type&quot;:&quot;text&quot;}"/>
+          <p:cNvPr id="341" name="" descr="{&quot;isTemplate&quot;:true,&quot;type&quot;:&quot;text&quot;}"/>
           <p:cNvSpPr txBox="1"/>
           <p:nvPr/>
         </p:nvSpPr>
@@ -17621,7 +17896,7 @@
       </p:sp>
       <p:sp>
         <p:nvSpPr>
-          <p:cNvPr id="335" name="" descr="{&quot;isTemplate&quot;:true,&quot;type&quot;:&quot;text&quot;}"/>
+          <p:cNvPr id="342" name="" descr="{&quot;isTemplate&quot;:true,&quot;type&quot;:&quot;text&quot;}"/>
           <p:cNvSpPr txBox="1"/>
           <p:nvPr/>
         </p:nvSpPr>
@@ -17728,7 +18003,7 @@
       </p:sp>
       <p:sp>
         <p:nvSpPr>
-          <p:cNvPr id="336" name="" descr="{&quot;isTemplate&quot;:true,&quot;type&quot;:&quot;text&quot;}"/>
+          <p:cNvPr id="343" name="" descr="{&quot;isTemplate&quot;:true,&quot;type&quot;:&quot;text&quot;}"/>
           <p:cNvSpPr txBox="1"/>
           <p:nvPr/>
         </p:nvSpPr>
@@ -17875,7 +18150,7 @@
       </p:sp>
       <p:sp>
         <p:nvSpPr>
-          <p:cNvPr id="337" name=""/>
+          <p:cNvPr id="344" name=""/>
           <p:cNvSpPr/>
           <p:nvPr/>
         </p:nvSpPr>
@@ -17901,7 +18176,7 @@
       </p:sp>
       <p:pic>
         <p:nvPicPr>
-          <p:cNvPr id="338" name=""/>
+          <p:cNvPr id="345" name=""/>
           <p:cNvPicPr>
             <a:picLocks noChangeAspect="1"/>
           </p:cNvPicPr>
@@ -17929,7 +18204,7 @@
       </p:pic>
       <p:sp>
         <p:nvSpPr>
-          <p:cNvPr id="339" name=""/>
+          <p:cNvPr id="346" name=""/>
           <p:cNvSpPr/>
           <p:nvPr/>
         </p:nvSpPr>
@@ -17955,7 +18230,7 @@
       </p:sp>
       <p:pic>
         <p:nvPicPr>
-          <p:cNvPr id="340" name=""/>
+          <p:cNvPr id="347" name=""/>
           <p:cNvPicPr>
             <a:picLocks noChangeAspect="1"/>
           </p:cNvPicPr>
@@ -17983,7 +18258,7 @@
       </p:pic>
       <p:sp>
         <p:nvSpPr>
-          <p:cNvPr id="341" name=""/>
+          <p:cNvPr id="348" name=""/>
           <p:cNvSpPr/>
           <p:nvPr/>
         </p:nvSpPr>
@@ -18009,7 +18284,7 @@
       </p:sp>
       <p:pic>
         <p:nvPicPr>
-          <p:cNvPr id="342" name=""/>
+          <p:cNvPr id="349" name=""/>
           <p:cNvPicPr>
             <a:picLocks noChangeAspect="1"/>
           </p:cNvPicPr>
@@ -18037,7 +18312,7 @@
       </p:pic>
       <p:sp>
         <p:nvSpPr>
-          <p:cNvPr id="343" name=""/>
+          <p:cNvPr id="350" name=""/>
           <p:cNvSpPr/>
           <p:nvPr/>
         </p:nvSpPr>
@@ -18063,7 +18338,7 @@
       </p:sp>
       <p:sp>
         <p:nvSpPr>
-          <p:cNvPr id="344" name=""/>
+          <p:cNvPr id="351" name=""/>
           <p:cNvSpPr/>
           <p:nvPr/>
         </p:nvSpPr>
@@ -18120,7 +18395,7 @@
       </p:sp>
       <p:sp>
         <p:nvSpPr>
-          <p:cNvPr id="345" name="" descr="{&quot;isTemplate&quot;:true,&quot;type&quot;:&quot;text&quot;}"/>
+          <p:cNvPr id="352" name="" descr="{&quot;isTemplate&quot;:true,&quot;type&quot;:&quot;text&quot;}"/>
           <p:cNvSpPr txBox="1"/>
           <p:nvPr/>
         </p:nvSpPr>
@@ -18287,7 +18562,7 @@
       </p:sp>
       <p:sp>
         <p:nvSpPr>
-          <p:cNvPr id="346" name="" descr="{&quot;isTemplate&quot;:true,&quot;type&quot;:&quot;text&quot;}"/>
+          <p:cNvPr id="353" name="" descr="{&quot;isTemplate&quot;:true,&quot;type&quot;:&quot;text&quot;}"/>
           <p:cNvSpPr txBox="1"/>
           <p:nvPr/>
         </p:nvSpPr>
